--- a/report/HITL_slides.pptx
+++ b/report/HITL_slides.pptx
@@ -5629,8 +5629,8 @@
         </p:nvSpPr>
         <p:spPr>
           <a:xfrm>
-            <a:off x="502920" y="1024128"/>
-            <a:ext cx="11155680" cy="457200"/>
+            <a:off x="502920" y="1005840"/>
+            <a:ext cx="11155680" cy="365760"/>
           </a:xfrm>
           <a:prstGeom prst="rect">
             <a:avLst/>
@@ -5645,17 +5645,17 @@
           <a:p>
             <a:pPr algn="l">
               <a:lnSpc>
-                <a:spcPct val="115000"/>
-              </a:lnSpc>
-            </a:pPr>
-            <a:r>
-              <a:rPr sz="1250" b="0">
+                <a:spcPct val="112000"/>
+              </a:lnSpc>
+            </a:pPr>
+            <a:r>
+              <a:rPr sz="1150" b="0">
                 <a:solidFill>
                   <a:srgbClr val="5B6775"/>
                 </a:solidFill>
                 <a:latin typeface="Calibri"/>
               </a:rPr>
-              <a:t>Each board subscribes to its own aircraft's camera, runs YOLO11n under OpenVINO, and publishes only the bounding boxes. The camera geometry — not the model — governs whether a person is detectable at all.</a:t>
+              <a:t>Each board subscribes to its own aircraft's camera, runs YOLO11n under OpenVINO, and publishes only the bounding boxes. Whether a person is detectable at all is set by six physical and software parameters, derived and measured below.</a:t>
             </a:r>
           </a:p>
         </p:txBody>
@@ -5668,8 +5668,8 @@
         </p:nvSpPr>
         <p:spPr>
           <a:xfrm>
-            <a:off x="502920" y="1645920"/>
-            <a:ext cx="6903720" cy="2880360"/>
+            <a:off x="502920" y="1481328"/>
+            <a:ext cx="5074920" cy="2468880"/>
           </a:xfrm>
           <a:prstGeom prst="rect">
             <a:avLst/>
@@ -5714,8 +5714,8 @@
         </p:nvSpPr>
         <p:spPr>
           <a:xfrm>
-            <a:off x="868680" y="3931920"/>
-            <a:ext cx="6172200" cy="25603"/>
+            <a:off x="777240" y="3401568"/>
+            <a:ext cx="4389120" cy="23774"/>
           </a:xfrm>
           <a:prstGeom prst="rect">
             <a:avLst/>
@@ -5758,8 +5758,8 @@
         </p:nvSpPr>
         <p:spPr>
           <a:xfrm>
-            <a:off x="868680" y="4023359"/>
-            <a:ext cx="914400" cy="182880"/>
+            <a:off x="777240" y="3483864"/>
+            <a:ext cx="914400" cy="164592"/>
           </a:xfrm>
           <a:prstGeom prst="rect">
             <a:avLst/>
@@ -5778,7 +5778,7 @@
               </a:lnSpc>
             </a:pPr>
             <a:r>
-              <a:rPr sz="850" b="1">
+              <a:rPr sz="750" b="1">
                 <a:solidFill>
                   <a:srgbClr val="8A94A1"/>
                 </a:solidFill>
@@ -5797,8 +5797,8 @@
         </p:nvSpPr>
         <p:spPr>
           <a:xfrm>
-            <a:off x="1627632" y="2194560"/>
-            <a:ext cx="4178808" cy="1737360"/>
+            <a:off x="1463040" y="1755648"/>
+            <a:ext cx="3200400" cy="1645920"/>
           </a:xfrm>
           <a:custGeom>
             <a:avLst/>
@@ -5807,15 +5807,15 @@
             <a:cxnLst/>
             <a:rect l="l" t="t" r="r" b="b"/>
             <a:pathLst>
-              <a:path w="4178808" h="1737360">
+              <a:path w="3200400" h="1645920">
                 <a:moveTo>
                   <a:pt x="0" y="0"/>
                 </a:moveTo>
                 <a:lnTo>
-                  <a:pt x="1161288" y="1737360"/>
+                  <a:pt x="914399" y="1645920"/>
                 </a:lnTo>
                 <a:lnTo>
-                  <a:pt x="4178808" y="1737360"/>
+                  <a:pt x="3200400" y="1645920"/>
                 </a:lnTo>
                 <a:close/>
               </a:path>
@@ -5861,8 +5861,8 @@
         </p:nvSpPr>
         <p:spPr>
           <a:xfrm>
-            <a:off x="1234440" y="1883664"/>
-            <a:ext cx="777240" cy="274320"/>
+            <a:off x="1170432" y="1682496"/>
+            <a:ext cx="658368" cy="237744"/>
           </a:xfrm>
           <a:prstGeom prst="rect">
             <a:avLst/>
@@ -5907,8 +5907,8 @@
         </p:nvSpPr>
         <p:spPr>
           <a:xfrm>
-            <a:off x="1316736" y="1929384"/>
-            <a:ext cx="640080" cy="201168"/>
+            <a:off x="1234440" y="1719072"/>
+            <a:ext cx="548640" cy="164592"/>
           </a:xfrm>
           <a:prstGeom prst="rect">
             <a:avLst/>
@@ -5927,7 +5927,7 @@
               </a:lnSpc>
             </a:pPr>
             <a:r>
-              <a:rPr sz="950" b="1">
+              <a:rPr sz="800" b="1">
                 <a:solidFill>
                   <a:srgbClr val="141C26"/>
                 </a:solidFill>
@@ -5946,8 +5946,8 @@
         </p:nvSpPr>
         <p:spPr>
           <a:xfrm>
-            <a:off x="1609344" y="2157984"/>
-            <a:ext cx="16459" cy="1773936"/>
+            <a:off x="1463040" y="1929384"/>
+            <a:ext cx="14630" cy="1472184"/>
           </a:xfrm>
           <a:prstGeom prst="rect">
             <a:avLst/>
@@ -5990,8 +5990,8 @@
         </p:nvSpPr>
         <p:spPr>
           <a:xfrm>
-            <a:off x="1097280" y="2834640"/>
-            <a:ext cx="457200" cy="182880"/>
+            <a:off x="1078992" y="2395728"/>
+            <a:ext cx="548640" cy="164592"/>
           </a:xfrm>
           <a:prstGeom prst="rect">
             <a:avLst/>
@@ -6010,7 +6010,7 @@
               </a:lnSpc>
             </a:pPr>
             <a:r>
-              <a:rPr sz="900" b="0">
+              <a:rPr sz="750" b="0">
                 <a:solidFill>
                   <a:srgbClr val="5B6775"/>
                 </a:solidFill>
@@ -6029,8 +6029,8 @@
         </p:nvSpPr>
         <p:spPr>
           <a:xfrm>
-            <a:off x="1627632" y="3899915"/>
-            <a:ext cx="1161288" cy="45720"/>
+            <a:off x="1463040" y="3374136"/>
+            <a:ext cx="914399" cy="41148"/>
           </a:xfrm>
           <a:prstGeom prst="rect">
             <a:avLst/>
@@ -6073,8 +6073,8 @@
         </p:nvSpPr>
         <p:spPr>
           <a:xfrm>
-            <a:off x="1417320" y="3639312"/>
-            <a:ext cx="2011680" cy="182880"/>
+            <a:off x="1371600" y="3154680"/>
+            <a:ext cx="1737360" cy="164592"/>
           </a:xfrm>
           <a:prstGeom prst="rect">
             <a:avLst/>
@@ -6093,13 +6093,13 @@
               </a:lnSpc>
             </a:pPr>
             <a:r>
-              <a:rPr sz="850" b="1">
+              <a:rPr sz="750" b="1">
                 <a:solidFill>
                   <a:srgbClr val="B0430B"/>
                 </a:solidFill>
                 <a:latin typeface="Consolas"/>
               </a:rPr>
-              <a:t>blind zone 0–20.6 m</a:t>
+              <a:t>blind: 0–20.6 m</a:t>
             </a:r>
           </a:p>
         </p:txBody>
@@ -6112,8 +6112,8 @@
         </p:nvSpPr>
         <p:spPr>
           <a:xfrm>
-            <a:off x="2615184" y="4023359"/>
-            <a:ext cx="822960" cy="182880"/>
+            <a:off x="2121407" y="3483864"/>
+            <a:ext cx="731520" cy="164592"/>
           </a:xfrm>
           <a:prstGeom prst="rect">
             <a:avLst/>
@@ -6132,7 +6132,7 @@
               </a:lnSpc>
             </a:pPr>
             <a:r>
-              <a:rPr sz="850" b="0">
+              <a:rPr sz="750" b="0">
                 <a:solidFill>
                   <a:srgbClr val="5B6775"/>
                 </a:solidFill>
@@ -6151,8 +6151,8 @@
         </p:nvSpPr>
         <p:spPr>
           <a:xfrm>
-            <a:off x="5504688" y="4023359"/>
-            <a:ext cx="822960" cy="182880"/>
+            <a:off x="4407407" y="3483864"/>
+            <a:ext cx="731520" cy="164592"/>
           </a:xfrm>
           <a:prstGeom prst="rect">
             <a:avLst/>
@@ -6171,7 +6171,7 @@
               </a:lnSpc>
             </a:pPr>
             <a:r>
-              <a:rPr sz="850" b="0">
+              <a:rPr sz="750" b="0">
                 <a:solidFill>
                   <a:srgbClr val="5B6775"/>
                 </a:solidFill>
@@ -6190,8 +6190,8 @@
         </p:nvSpPr>
         <p:spPr>
           <a:xfrm>
-            <a:off x="3931920" y="3657600"/>
-            <a:ext cx="1463040" cy="182880"/>
+            <a:off x="3017520" y="3163824"/>
+            <a:ext cx="1188720" cy="164592"/>
           </a:xfrm>
           <a:prstGeom prst="rect">
             <a:avLst/>
@@ -6210,7 +6210,7 @@
               </a:lnSpc>
             </a:pPr>
             <a:r>
-              <a:rPr sz="900" b="1">
+              <a:rPr sz="750" b="1">
                 <a:solidFill>
                   <a:srgbClr val="0B6E7F"/>
                 </a:solidFill>
@@ -6229,8 +6229,8 @@
         </p:nvSpPr>
         <p:spPr>
           <a:xfrm>
-            <a:off x="4343400" y="3767328"/>
-            <a:ext cx="32004" cy="164592"/>
+            <a:off x="3520439" y="3264408"/>
+            <a:ext cx="27432" cy="137160"/>
           </a:xfrm>
           <a:prstGeom prst="rect">
             <a:avLst/>
@@ -6273,8 +6273,8 @@
         </p:nvSpPr>
         <p:spPr>
           <a:xfrm>
-            <a:off x="4041648" y="3456432"/>
-            <a:ext cx="1097280" cy="182880"/>
+            <a:off x="3200399" y="2999232"/>
+            <a:ext cx="914400" cy="164592"/>
           </a:xfrm>
           <a:prstGeom prst="rect">
             <a:avLst/>
@@ -6293,7 +6293,7 @@
               </a:lnSpc>
             </a:pPr>
             <a:r>
-              <a:rPr sz="850" b="0">
+              <a:rPr sz="750" b="0">
                 <a:solidFill>
                   <a:srgbClr val="141C26"/>
                 </a:solidFill>
@@ -6312,8 +6312,8 @@
         </p:nvSpPr>
         <p:spPr>
           <a:xfrm>
-            <a:off x="5989320" y="1920240"/>
-            <a:ext cx="1325880" cy="1737360"/>
+            <a:off x="3886200" y="1627632"/>
+            <a:ext cx="1600200" cy="1463040"/>
           </a:xfrm>
           <a:prstGeom prst="rect">
             <a:avLst/>
@@ -6328,145 +6328,81 @@
           <a:p>
             <a:pPr algn="l">
               <a:lnSpc>
-                <a:spcPct val="130000"/>
-              </a:lnSpc>
-            </a:pPr>
-            <a:r>
-              <a:rPr sz="900" b="0">
+                <a:spcPct val="125000"/>
+              </a:lnSpc>
+            </a:pPr>
+            <a:r>
+              <a:rPr sz="750" b="0">
                 <a:solidFill>
                   <a:srgbClr val="5B6775"/>
                 </a:solidFill>
                 <a:latin typeface="Consolas"/>
               </a:rPr>
-              <a:t>45° down-pitch</a:t>
-            </a:r>
-          </a:p>
-          <a:p>
-            <a:pPr algn="l">
-              <a:lnSpc>
-                <a:spcPct val="130000"/>
-              </a:lnSpc>
-            </a:pPr>
-            <a:r>
-              <a:rPr sz="900" b="0">
+              <a:t>45° pitch · 0.6 rad</a:t>
+            </a:r>
+          </a:p>
+          <a:p>
+            <a:pPr algn="l">
+              <a:lnSpc>
+                <a:spcPct val="125000"/>
+              </a:lnSpc>
+            </a:pPr>
+            <a:r>
+              <a:rPr sz="750" b="0">
                 <a:solidFill>
                   <a:srgbClr val="5B6775"/>
                 </a:solidFill>
                 <a:latin typeface="Consolas"/>
               </a:rPr>
-              <a:t>0.6 rad H-FOV</a:t>
-            </a:r>
-          </a:p>
-          <a:p>
-            <a:pPr algn="l">
-              <a:lnSpc>
-                <a:spcPct val="130000"/>
-              </a:lnSpc>
-            </a:pPr>
-            <a:r>
-              <a:rPr sz="900" b="0">
+              <a:t>640×384 @ 5 Hz</a:t>
+            </a:r>
+          </a:p>
+          <a:p>
+            <a:pPr algn="l">
+              <a:lnSpc>
+                <a:spcPct val="125000"/>
+              </a:lnSpc>
+            </a:pPr>
+            <a:r>
+              <a:rPr sz="750" b="0">
                 <a:solidFill>
                   <a:srgbClr val="5B6775"/>
                 </a:solidFill>
                 <a:latin typeface="Consolas"/>
               </a:rPr>
-              <a:t>640×384 @ 5 Hz</a:t>
-            </a:r>
-          </a:p>
-          <a:p>
-            <a:pPr algn="l">
-              <a:lnSpc>
-                <a:spcPct val="130000"/>
-              </a:lnSpc>
-            </a:pPr>
-            <a:r>
-              <a:rPr sz="900" b="0">
+              <a:t/>
+            </a:r>
+          </a:p>
+          <a:p>
+            <a:pPr algn="l">
+              <a:lnSpc>
+                <a:spcPct val="125000"/>
+              </a:lnSpc>
+            </a:pPr>
+            <a:r>
+              <a:rPr sz="750" b="0">
                 <a:solidFill>
                   <a:srgbClr val="5B6775"/>
                 </a:solidFill>
                 <a:latin typeface="Consolas"/>
               </a:rPr>
-              <a:t/>
-            </a:r>
-          </a:p>
-          <a:p>
-            <a:pPr algn="l">
-              <a:lnSpc>
-                <a:spcPct val="130000"/>
-              </a:lnSpc>
-            </a:pPr>
-            <a:r>
-              <a:rPr sz="900" b="0">
+              <a:t>band = 0.687h</a:t>
+            </a:r>
+          </a:p>
+          <a:p>
+            <a:pPr algn="l">
+              <a:lnSpc>
+                <a:spcPct val="125000"/>
+              </a:lnSpc>
+            </a:pPr>
+            <a:r>
+              <a:rPr sz="750" b="0">
                 <a:solidFill>
                   <a:srgbClr val="5B6775"/>
                 </a:solidFill>
                 <a:latin typeface="Consolas"/>
               </a:rPr>
-              <a:t>band = 0.687h</a:t>
-            </a:r>
-          </a:p>
-          <a:p>
-            <a:pPr algn="l">
-              <a:lnSpc>
-                <a:spcPct val="130000"/>
-              </a:lnSpc>
-            </a:pPr>
-            <a:r>
-              <a:rPr sz="900" b="0">
-                <a:solidFill>
-                  <a:srgbClr val="5B6775"/>
-                </a:solidFill>
-                <a:latin typeface="Consolas"/>
-              </a:rPr>
-              <a:t>        … 1.453h</a:t>
-            </a:r>
-          </a:p>
-          <a:p>
-            <a:pPr algn="l">
-              <a:lnSpc>
-                <a:spcPct val="130000"/>
-              </a:lnSpc>
-            </a:pPr>
-            <a:r>
-              <a:rPr sz="900" b="0">
-                <a:solidFill>
-                  <a:srgbClr val="5B6775"/>
-                </a:solidFill>
-                <a:latin typeface="Consolas"/>
-              </a:rPr>
-              <a:t/>
-            </a:r>
-          </a:p>
-          <a:p>
-            <a:pPr algn="l">
-              <a:lnSpc>
-                <a:spcPct val="130000"/>
-              </a:lnSpc>
-            </a:pPr>
-            <a:r>
-              <a:rPr sz="900" b="0">
-                <a:solidFill>
-                  <a:srgbClr val="5B6775"/>
-                </a:solidFill>
-                <a:latin typeface="Consolas"/>
-              </a:rPr>
-              <a:t>person px</a:t>
-            </a:r>
-          </a:p>
-          <a:p>
-            <a:pPr algn="l">
-              <a:lnSpc>
-                <a:spcPct val="130000"/>
-              </a:lnSpc>
-            </a:pPr>
-            <a:r>
-              <a:rPr sz="900" b="0">
-                <a:solidFill>
-                  <a:srgbClr val="5B6775"/>
-                </a:solidFill>
-                <a:latin typeface="Consolas"/>
-              </a:rPr>
-              <a:t>  ≈ 889 / h</a:t>
+              <a:t>       … 1.453h</a:t>
             </a:r>
           </a:p>
         </p:txBody>
@@ -6479,8 +6415,8 @@
         </p:nvSpPr>
         <p:spPr>
           <a:xfrm>
-            <a:off x="7726679" y="1645920"/>
-            <a:ext cx="3931920" cy="201168"/>
+            <a:off x="594360" y="3712464"/>
+            <a:ext cx="4892040" cy="182880"/>
           </a:xfrm>
           <a:prstGeom prst="rect">
             <a:avLst/>
@@ -6499,13 +6435,13 @@
               </a:lnSpc>
             </a:pPr>
             <a:r>
-              <a:rPr sz="900" b="1">
+              <a:rPr sz="750" b="0">
                 <a:solidFill>
                   <a:srgbClr val="8A94A1"/>
                 </a:solidFill>
                 <a:latin typeface="Consolas"/>
               </a:rPr>
-              <a:t>PIPELINE, PER AIRCRAFT</a:t>
+              <a:t>GSD &amp; pixel-height derivation → parameters 1 and 3, right</a:t>
             </a:r>
           </a:p>
         </p:txBody>
@@ -6518,8 +6454,8 @@
         </p:nvSpPr>
         <p:spPr>
           <a:xfrm>
-            <a:off x="7726679" y="1920240"/>
-            <a:ext cx="1325880" cy="201168"/>
+            <a:off x="5760720" y="1481328"/>
+            <a:ext cx="5925312" cy="182880"/>
           </a:xfrm>
           <a:prstGeom prst="rect">
             <a:avLst/>
@@ -6538,13 +6474,13 @@
               </a:lnSpc>
             </a:pPr>
             <a:r>
-              <a:rPr sz="950" b="0">
-                <a:solidFill>
-                  <a:srgbClr val="5B6775"/>
-                </a:solidFill>
-                <a:latin typeface="Calibri"/>
-              </a:rPr>
-              <a:t>Capture</a:t>
+              <a:rPr sz="900" b="1">
+                <a:solidFill>
+                  <a:srgbClr val="8A94A1"/>
+                </a:solidFill>
+                <a:latin typeface="Consolas"/>
+              </a:rPr>
+              <a:t>DETECTION SENSITIVITY PARAMETERS</a:t>
             </a:r>
           </a:p>
         </p:txBody>
@@ -6557,8 +6493,8 @@
         </p:nvSpPr>
         <p:spPr>
           <a:xfrm>
-            <a:off x="9144000" y="1920240"/>
-            <a:ext cx="2560320" cy="201168"/>
+            <a:off x="5760720" y="1755648"/>
+            <a:ext cx="5925312" cy="155448"/>
           </a:xfrm>
           <a:prstGeom prst="rect">
             <a:avLst/>
@@ -6577,27 +6513,66 @@
               </a:lnSpc>
             </a:pPr>
             <a:r>
-              <a:rPr sz="950" b="0">
+              <a:rPr sz="850" b="1">
                 <a:solidFill>
                   <a:srgbClr val="141C26"/>
                 </a:solidFill>
+                <a:latin typeface="Calibri"/>
+              </a:rPr>
+              <a:t>1  Ground Sampling Distance (GSD)</a:t>
+            </a:r>
+          </a:p>
+        </p:txBody>
+      </p:sp>
+      <p:sp>
+        <p:nvSpPr>
+          <p:cNvPr id="27" name="TextBox 26"/>
+          <p:cNvSpPr txBox="1"/>
+          <p:nvPr/>
+        </p:nvSpPr>
+        <p:spPr>
+          <a:xfrm>
+            <a:off x="5760720" y="1915668"/>
+            <a:ext cx="5925312" cy="146304"/>
+          </a:xfrm>
+          <a:prstGeom prst="rect">
+            <a:avLst/>
+          </a:prstGeom>
+          <a:noFill/>
+        </p:spPr>
+        <p:txBody>
+          <a:bodyPr wrap="square" anchor="t" lIns="0" rIns="0" tIns="0" bIns="0">
+            <a:spAutoFit/>
+          </a:bodyPr>
+          <a:lstStyle/>
+          <a:p>
+            <a:pPr algn="l">
+              <a:lnSpc>
+                <a:spcPct val="100000"/>
+              </a:lnSpc>
+            </a:pPr>
+            <a:r>
+              <a:rPr sz="800" b="0">
+                <a:solidFill>
+                  <a:srgbClr val="5B6775"/>
+                </a:solidFill>
                 <a:latin typeface="Consolas"/>
               </a:rPr>
-              <a:t>640×384 RGB @ 5 Hz</a:t>
-            </a:r>
-          </a:p>
-        </p:txBody>
-      </p:sp>
-      <p:sp>
-        <p:nvSpPr>
-          <p:cNvPr id="27" name="Rectangle 26"/>
+              <a:t>GSD = 2h*tan(HFOV/2)/W  =  2.9 cm/px @ 30 m (nadir-equiv)</a:t>
+            </a:r>
+          </a:p>
+        </p:txBody>
+      </p:sp>
+      <p:sp>
+        <p:nvSpPr>
+          <p:cNvPr id="28" name="Rectangle 27"/>
           <p:cNvSpPr/>
           <p:nvPr/>
         </p:nvSpPr>
         <p:spPr>
           <a:xfrm>
-            <a:off x="7726679" y="2167128"/>
-            <a:ext cx="3950208" cy="7315"/>
+            <a:off x="5760720" y="2066543"/>
+            <a:ext cx="5925312" cy="7315"/>
           </a:xfrm>
           <a:prstGeom prst="rect">
             <a:avLst/>
@@ -6634,14 +6609,14 @@
       </p:sp>
       <p:sp>
         <p:nvSpPr>
-          <p:cNvPr id="28" name="TextBox 27"/>
+          <p:cNvPr id="29" name="TextBox 28"/>
           <p:cNvSpPr txBox="1"/>
           <p:nvPr/>
         </p:nvSpPr>
         <p:spPr>
           <a:xfrm>
-            <a:off x="7726679" y="2286000"/>
-            <a:ext cx="1325880" cy="201168"/>
+            <a:off x="5760720" y="2098548"/>
+            <a:ext cx="5925312" cy="155448"/>
           </a:xfrm>
           <a:prstGeom prst="rect">
             <a:avLst/>
@@ -6660,27 +6635,27 @@
               </a:lnSpc>
             </a:pPr>
             <a:r>
-              <a:rPr sz="950" b="0">
-                <a:solidFill>
-                  <a:srgbClr val="5B6775"/>
+              <a:rPr sz="850" b="1">
+                <a:solidFill>
+                  <a:srgbClr val="141C26"/>
                 </a:solidFill>
                 <a:latin typeface="Calibri"/>
               </a:rPr>
-              <a:t>Transport</a:t>
-            </a:r>
-          </a:p>
-        </p:txBody>
-      </p:sp>
-      <p:sp>
-        <p:nvSpPr>
-          <p:cNvPr id="29" name="TextBox 28"/>
+              <a:t>2  Camera resolution</a:t>
+            </a:r>
+          </a:p>
+        </p:txBody>
+      </p:sp>
+      <p:sp>
+        <p:nvSpPr>
+          <p:cNvPr id="30" name="TextBox 29"/>
           <p:cNvSpPr txBox="1"/>
           <p:nvPr/>
         </p:nvSpPr>
         <p:spPr>
           <a:xfrm>
-            <a:off x="9144000" y="2286000"/>
-            <a:ext cx="2560320" cy="201168"/>
+            <a:off x="5760720" y="2258568"/>
+            <a:ext cx="5925312" cy="146304"/>
           </a:xfrm>
           <a:prstGeom prst="rect">
             <a:avLst/>
@@ -6699,27 +6674,27 @@
               </a:lnSpc>
             </a:pPr>
             <a:r>
-              <a:rPr sz="950" b="0">
-                <a:solidFill>
-                  <a:srgbClr val="141C26"/>
+              <a:rPr sz="800" b="0">
+                <a:solidFill>
+                  <a:srgbClr val="5B6775"/>
                 </a:solidFill>
                 <a:latin typeface="Consolas"/>
               </a:rPr>
-              <a:t>VLAN 10, unimpaired</a:t>
-            </a:r>
-          </a:p>
-        </p:txBody>
-      </p:sp>
-      <p:sp>
-        <p:nvSpPr>
-          <p:cNvPr id="30" name="Rectangle 29"/>
+              <a:t>640x384 px, frozen by the OpenVINO export shape</a:t>
+            </a:r>
+          </a:p>
+        </p:txBody>
+      </p:sp>
+      <p:sp>
+        <p:nvSpPr>
+          <p:cNvPr id="31" name="Rectangle 30"/>
           <p:cNvSpPr/>
           <p:nvPr/>
         </p:nvSpPr>
         <p:spPr>
           <a:xfrm>
-            <a:off x="7726679" y="2532888"/>
-            <a:ext cx="3950208" cy="7315"/>
+            <a:off x="5760720" y="2409444"/>
+            <a:ext cx="5925312" cy="7315"/>
           </a:xfrm>
           <a:prstGeom prst="rect">
             <a:avLst/>
@@ -6756,14 +6731,14 @@
       </p:sp>
       <p:sp>
         <p:nvSpPr>
-          <p:cNvPr id="31" name="TextBox 30"/>
+          <p:cNvPr id="32" name="TextBox 31"/>
           <p:cNvSpPr txBox="1"/>
           <p:nvPr/>
         </p:nvSpPr>
         <p:spPr>
           <a:xfrm>
-            <a:off x="7726679" y="2651760"/>
-            <a:ext cx="1325880" cy="201168"/>
+            <a:off x="5760720" y="2441448"/>
+            <a:ext cx="5925312" cy="155448"/>
           </a:xfrm>
           <a:prstGeom prst="rect">
             <a:avLst/>
@@ -6782,27 +6757,27 @@
               </a:lnSpc>
             </a:pPr>
             <a:r>
-              <a:rPr sz="950" b="0">
-                <a:solidFill>
-                  <a:srgbClr val="5B6775"/>
+              <a:rPr sz="850" b="1">
+                <a:solidFill>
+                  <a:srgbClr val="141C26"/>
                 </a:solidFill>
                 <a:latin typeface="Calibri"/>
               </a:rPr>
-              <a:t>Model</a:t>
-            </a:r>
-          </a:p>
-        </p:txBody>
-      </p:sp>
-      <p:sp>
-        <p:nvSpPr>
-          <p:cNvPr id="32" name="TextBox 31"/>
+              <a:t>3  Person height in pixels</a:t>
+            </a:r>
+          </a:p>
+        </p:txBody>
+      </p:sp>
+      <p:sp>
+        <p:nvSpPr>
+          <p:cNvPr id="33" name="TextBox 32"/>
           <p:cNvSpPr txBox="1"/>
           <p:nvPr/>
         </p:nvSpPr>
         <p:spPr>
           <a:xfrm>
-            <a:off x="9144000" y="2651760"/>
-            <a:ext cx="2560320" cy="201168"/>
+            <a:off x="5760720" y="2601468"/>
+            <a:ext cx="5925312" cy="146304"/>
           </a:xfrm>
           <a:prstGeom prst="rect">
             <a:avLst/>
@@ -6821,27 +6796,27 @@
               </a:lnSpc>
             </a:pPr>
             <a:r>
-              <a:rPr sz="950" b="0">
-                <a:solidFill>
-                  <a:srgbClr val="141C26"/>
+              <a:rPr sz="800" b="0">
+                <a:solidFill>
+                  <a:srgbClr val="5B6775"/>
                 </a:solidFill>
                 <a:latin typeface="Consolas"/>
               </a:rPr>
-              <a:t>YOLO11n · OpenVINO FP32</a:t>
-            </a:r>
-          </a:p>
-        </p:txBody>
-      </p:sp>
-      <p:sp>
-        <p:nvSpPr>
-          <p:cNvPr id="33" name="Rectangle 32"/>
+              <a:t>px = 889 / altitude(m)  -&gt;  30 px @ 30 m, 45 px @ 20 m</a:t>
+            </a:r>
+          </a:p>
+        </p:txBody>
+      </p:sp>
+      <p:sp>
+        <p:nvSpPr>
+          <p:cNvPr id="34" name="Rectangle 33"/>
           <p:cNvSpPr/>
           <p:nvPr/>
         </p:nvSpPr>
         <p:spPr>
           <a:xfrm>
-            <a:off x="7726679" y="2898648"/>
-            <a:ext cx="3950208" cy="7315"/>
+            <a:off x="5760720" y="2752344"/>
+            <a:ext cx="5925312" cy="7315"/>
           </a:xfrm>
           <a:prstGeom prst="rect">
             <a:avLst/>
@@ -6878,14 +6853,14 @@
       </p:sp>
       <p:sp>
         <p:nvSpPr>
-          <p:cNvPr id="34" name="TextBox 33"/>
+          <p:cNvPr id="35" name="TextBox 34"/>
           <p:cNvSpPr txBox="1"/>
           <p:nvPr/>
         </p:nvSpPr>
         <p:spPr>
           <a:xfrm>
-            <a:off x="7726679" y="3017520"/>
-            <a:ext cx="1325880" cy="201168"/>
+            <a:off x="5760720" y="2784348"/>
+            <a:ext cx="5925312" cy="155448"/>
           </a:xfrm>
           <a:prstGeom prst="rect">
             <a:avLst/>
@@ -6904,27 +6879,27 @@
               </a:lnSpc>
             </a:pPr>
             <a:r>
-              <a:rPr sz="950" b="0">
-                <a:solidFill>
-                  <a:srgbClr val="5B6775"/>
+              <a:rPr sz="850" b="1">
+                <a:solidFill>
+                  <a:srgbClr val="141C26"/>
                 </a:solidFill>
                 <a:latin typeface="Calibri"/>
               </a:rPr>
-              <a:t>Input shape</a:t>
-            </a:r>
-          </a:p>
-        </p:txBody>
-      </p:sp>
-      <p:sp>
-        <p:nvSpPr>
-          <p:cNvPr id="35" name="TextBox 34"/>
+              <a:t>4  Altitude</a:t>
+            </a:r>
+          </a:p>
+        </p:txBody>
+      </p:sp>
+      <p:sp>
+        <p:nvSpPr>
+          <p:cNvPr id="36" name="TextBox 35"/>
           <p:cNvSpPr txBox="1"/>
           <p:nvPr/>
         </p:nvSpPr>
         <p:spPr>
           <a:xfrm>
-            <a:off x="9144000" y="3017520"/>
-            <a:ext cx="2560320" cy="201168"/>
+            <a:off x="5760720" y="2944368"/>
+            <a:ext cx="5925312" cy="146304"/>
           </a:xfrm>
           <a:prstGeom prst="rect">
             <a:avLst/>
@@ -6943,27 +6918,27 @@
               </a:lnSpc>
             </a:pPr>
             <a:r>
-              <a:rPr sz="950" b="0">
-                <a:solidFill>
-                  <a:srgbClr val="141C26"/>
+              <a:rPr sz="800" b="0">
+                <a:solidFill>
+                  <a:srgbClr val="5B6775"/>
                 </a:solidFill>
                 <a:latin typeface="Consolas"/>
               </a:rPr>
-              <a:t>1×3×384×640 (frozen)</a:t>
-            </a:r>
-          </a:p>
-        </p:txBody>
-      </p:sp>
-      <p:sp>
-        <p:nvSpPr>
-          <p:cNvPr id="36" name="Rectangle 35"/>
+              <a:t>drives GSD &amp; pixel height directly; reliable window ~15-25 m</a:t>
+            </a:r>
+          </a:p>
+        </p:txBody>
+      </p:sp>
+      <p:sp>
+        <p:nvSpPr>
+          <p:cNvPr id="37" name="Rectangle 36"/>
           <p:cNvSpPr/>
           <p:nvPr/>
         </p:nvSpPr>
         <p:spPr>
           <a:xfrm>
-            <a:off x="7726679" y="3264408"/>
-            <a:ext cx="3950208" cy="7315"/>
+            <a:off x="5760720" y="3095244"/>
+            <a:ext cx="5925312" cy="7315"/>
           </a:xfrm>
           <a:prstGeom prst="rect">
             <a:avLst/>
@@ -7000,14 +6975,14 @@
       </p:sp>
       <p:sp>
         <p:nvSpPr>
-          <p:cNvPr id="37" name="TextBox 36"/>
+          <p:cNvPr id="38" name="TextBox 37"/>
           <p:cNvSpPr txBox="1"/>
           <p:nvPr/>
         </p:nvSpPr>
         <p:spPr>
           <a:xfrm>
-            <a:off x="7726679" y="3383279"/>
-            <a:ext cx="1325880" cy="201168"/>
+            <a:off x="5760720" y="3127248"/>
+            <a:ext cx="5925312" cy="155448"/>
           </a:xfrm>
           <a:prstGeom prst="rect">
             <a:avLst/>
@@ -7026,27 +7001,27 @@
               </a:lnSpc>
             </a:pPr>
             <a:r>
-              <a:rPr sz="950" b="0">
-                <a:solidFill>
-                  <a:srgbClr val="5B6775"/>
+              <a:rPr sz="850" b="1">
+                <a:solidFill>
+                  <a:srgbClr val="141C26"/>
                 </a:solidFill>
                 <a:latin typeface="Calibri"/>
               </a:rPr>
-              <a:t>Filter</a:t>
-            </a:r>
-          </a:p>
-        </p:txBody>
-      </p:sp>
-      <p:sp>
-        <p:nvSpPr>
-          <p:cNvPr id="38" name="TextBox 37"/>
+              <a:t>5  Flight speed -&gt; motion blur</a:t>
+            </a:r>
+          </a:p>
+        </p:txBody>
+      </p:sp>
+      <p:sp>
+        <p:nvSpPr>
+          <p:cNvPr id="39" name="TextBox 38"/>
           <p:cNvSpPr txBox="1"/>
           <p:nvPr/>
         </p:nvSpPr>
         <p:spPr>
           <a:xfrm>
-            <a:off x="9144000" y="3383279"/>
-            <a:ext cx="2560320" cy="201168"/>
+            <a:off x="5760720" y="3287268"/>
+            <a:ext cx="5925312" cy="146304"/>
           </a:xfrm>
           <a:prstGeom prst="rect">
             <a:avLst/>
@@ -7065,27 +7040,27 @@
               </a:lnSpc>
             </a:pPr>
             <a:r>
-              <a:rPr sz="950" b="0">
-                <a:solidFill>
-                  <a:srgbClr val="141C26"/>
+              <a:rPr sz="800" b="0">
+                <a:solidFill>
+                  <a:srgbClr val="5B6775"/>
                 </a:solidFill>
                 <a:latin typeface="Consolas"/>
               </a:rPr>
-              <a:t>conf 0.40 · class 0</a:t>
-            </a:r>
-          </a:p>
-        </p:txBody>
-      </p:sp>
-      <p:sp>
-        <p:nvSpPr>
-          <p:cNvPr id="39" name="Rectangle 38"/>
+              <a:t>blur(px) = v x t_exposure / GSD -- not modeled by Gazebo's camera</a:t>
+            </a:r>
+          </a:p>
+        </p:txBody>
+      </p:sp>
+      <p:sp>
+        <p:nvSpPr>
+          <p:cNvPr id="40" name="Rectangle 39"/>
           <p:cNvSpPr/>
           <p:nvPr/>
         </p:nvSpPr>
         <p:spPr>
           <a:xfrm>
-            <a:off x="7726679" y="3630168"/>
-            <a:ext cx="3950208" cy="7315"/>
+            <a:off x="5760720" y="3438144"/>
+            <a:ext cx="5925312" cy="7315"/>
           </a:xfrm>
           <a:prstGeom prst="rect">
             <a:avLst/>
@@ -7122,14 +7097,14 @@
       </p:sp>
       <p:sp>
         <p:nvSpPr>
-          <p:cNvPr id="40" name="TextBox 39"/>
+          <p:cNvPr id="41" name="TextBox 40"/>
           <p:cNvSpPr txBox="1"/>
           <p:nvPr/>
         </p:nvSpPr>
         <p:spPr>
           <a:xfrm>
-            <a:off x="7726679" y="3749039"/>
-            <a:ext cx="1325880" cy="201168"/>
+            <a:off x="5760720" y="3470148"/>
+            <a:ext cx="5925312" cy="155448"/>
           </a:xfrm>
           <a:prstGeom prst="rect">
             <a:avLst/>
@@ -7148,27 +7123,27 @@
               </a:lnSpc>
             </a:pPr>
             <a:r>
-              <a:rPr sz="950" b="0">
-                <a:solidFill>
-                  <a:srgbClr val="5B6775"/>
+              <a:rPr sz="850" b="1">
+                <a:solidFill>
+                  <a:srgbClr val="141C26"/>
                 </a:solidFill>
                 <a:latin typeface="Calibri"/>
               </a:rPr>
-              <a:t>Result out</a:t>
-            </a:r>
-          </a:p>
-        </p:txBody>
-      </p:sp>
-      <p:sp>
-        <p:nvSpPr>
-          <p:cNvPr id="41" name="TextBox 40"/>
+              <a:t>6  Gimbal pitch</a:t>
+            </a:r>
+          </a:p>
+        </p:txBody>
+      </p:sp>
+      <p:sp>
+        <p:nvSpPr>
+          <p:cNvPr id="42" name="TextBox 41"/>
           <p:cNvSpPr txBox="1"/>
           <p:nvPr/>
         </p:nvSpPr>
         <p:spPr>
           <a:xfrm>
-            <a:off x="9144000" y="3749039"/>
-            <a:ext cx="2560320" cy="201168"/>
+            <a:off x="5760720" y="3630168"/>
+            <a:ext cx="5925312" cy="146304"/>
           </a:xfrm>
           <a:prstGeom prst="rect">
             <a:avLst/>
@@ -7187,27 +7162,27 @@
               </a:lnSpc>
             </a:pPr>
             <a:r>
-              <a:rPr sz="950" b="0">
-                <a:solidFill>
-                  <a:srgbClr val="141C26"/>
+              <a:rPr sz="800" b="0">
+                <a:solidFill>
+                  <a:srgbClr val="5B6775"/>
                 </a:solidFill>
                 <a:latin typeface="Consolas"/>
               </a:rPr>
-              <a:t>JSON, 73–504 B</a:t>
-            </a:r>
-          </a:p>
-        </p:txBody>
-      </p:sp>
-      <p:sp>
-        <p:nvSpPr>
-          <p:cNvPr id="42" name="Rectangle 41"/>
+              <a:t>pixel height peaks at 45 deg; steeper widens the COCO-&gt;aerial gap</a:t>
+            </a:r>
+          </a:p>
+        </p:txBody>
+      </p:sp>
+      <p:sp>
+        <p:nvSpPr>
+          <p:cNvPr id="43" name="Rectangle 42"/>
           <p:cNvSpPr/>
           <p:nvPr/>
         </p:nvSpPr>
         <p:spPr>
           <a:xfrm>
-            <a:off x="7726679" y="3995927"/>
-            <a:ext cx="3950208" cy="7315"/>
+            <a:off x="5760720" y="3781044"/>
+            <a:ext cx="5925312" cy="7315"/>
           </a:xfrm>
           <a:prstGeom prst="rect">
             <a:avLst/>
@@ -7244,14 +7219,14 @@
       </p:sp>
       <p:sp>
         <p:nvSpPr>
-          <p:cNvPr id="43" name="TextBox 42"/>
+          <p:cNvPr id="44" name="TextBox 43"/>
           <p:cNvSpPr txBox="1"/>
           <p:nvPr/>
         </p:nvSpPr>
         <p:spPr>
           <a:xfrm>
-            <a:off x="7726679" y="4114800"/>
-            <a:ext cx="1325880" cy="201168"/>
+            <a:off x="5760720" y="3813048"/>
+            <a:ext cx="5925312" cy="155448"/>
           </a:xfrm>
           <a:prstGeom prst="rect">
             <a:avLst/>
@@ -7270,27 +7245,27 @@
               </a:lnSpc>
             </a:pPr>
             <a:r>
-              <a:rPr sz="950" b="0">
-                <a:solidFill>
-                  <a:srgbClr val="5B6775"/>
+              <a:rPr sz="850" b="1">
+                <a:solidFill>
+                  <a:srgbClr val="141C26"/>
                 </a:solidFill>
                 <a:latin typeface="Calibri"/>
               </a:rPr>
-              <a:t>Return path</a:t>
-            </a:r>
-          </a:p>
-        </p:txBody>
-      </p:sp>
-      <p:sp>
-        <p:nvSpPr>
-          <p:cNvPr id="44" name="TextBox 43"/>
+              <a:t>7  Inference backend (measured)</a:t>
+            </a:r>
+          </a:p>
+        </p:txBody>
+      </p:sp>
+      <p:sp>
+        <p:nvSpPr>
+          <p:cNvPr id="45" name="TextBox 44"/>
           <p:cNvSpPr txBox="1"/>
           <p:nvPr/>
         </p:nvSpPr>
         <p:spPr>
           <a:xfrm>
-            <a:off x="9144000" y="4114800"/>
-            <a:ext cx="2560320" cy="201168"/>
+            <a:off x="5760720" y="3973068"/>
+            <a:ext cx="5925312" cy="146304"/>
           </a:xfrm>
           <a:prstGeom prst="rect">
             <a:avLst/>
@@ -7309,27 +7284,27 @@
               </a:lnSpc>
             </a:pPr>
             <a:r>
-              <a:rPr sz="950" b="0">
-                <a:solidFill>
-                  <a:srgbClr val="141C26"/>
+              <a:rPr sz="800" b="0">
+                <a:solidFill>
+                  <a:srgbClr val="5B6775"/>
                 </a:solidFill>
                 <a:latin typeface="Consolas"/>
               </a:rPr>
-              <a:t>VLAN 42/43 → ns-3 → GCS</a:t>
-            </a:r>
-          </a:p>
-        </p:txBody>
-      </p:sp>
-      <p:sp>
-        <p:nvSpPr>
-          <p:cNvPr id="45" name="Rectangle 44"/>
+              <a:t>OpenVINO 236 ms &lt; NCNN 270 &lt; MNN 342 &lt; PyTorch 1,027 (PI_SETUP.md)</a:t>
+            </a:r>
+          </a:p>
+        </p:txBody>
+      </p:sp>
+      <p:sp>
+        <p:nvSpPr>
+          <p:cNvPr id="46" name="Rectangle 45"/>
           <p:cNvSpPr/>
           <p:nvPr/>
         </p:nvSpPr>
         <p:spPr>
           <a:xfrm>
-            <a:off x="7726679" y="4361688"/>
-            <a:ext cx="3950208" cy="7315"/>
+            <a:off x="5760720" y="4123944"/>
+            <a:ext cx="5925312" cy="7315"/>
           </a:xfrm>
           <a:prstGeom prst="rect">
             <a:avLst/>
@@ -7366,14 +7341,14 @@
       </p:sp>
       <p:sp>
         <p:nvSpPr>
-          <p:cNvPr id="46" name="TextBox 45"/>
+          <p:cNvPr id="47" name="TextBox 46"/>
           <p:cNvSpPr txBox="1"/>
           <p:nvPr/>
         </p:nvSpPr>
         <p:spPr>
           <a:xfrm>
-            <a:off x="502920" y="4754880"/>
-            <a:ext cx="5394960" cy="201168"/>
+            <a:off x="5760720" y="4155948"/>
+            <a:ext cx="5925312" cy="155448"/>
           </a:xfrm>
           <a:prstGeom prst="rect">
             <a:avLst/>
@@ -7392,27 +7367,27 @@
               </a:lnSpc>
             </a:pPr>
             <a:r>
-              <a:rPr sz="900" b="1">
-                <a:solidFill>
-                  <a:srgbClr val="8A94A1"/>
-                </a:solidFill>
-                <a:latin typeface="Consolas"/>
-              </a:rPr>
-              <a:t>FRAMES ARE DROPPED BY DESIGN</a:t>
-            </a:r>
-          </a:p>
-        </p:txBody>
-      </p:sp>
-      <p:sp>
-        <p:nvSpPr>
-          <p:cNvPr id="47" name="TextBox 46"/>
+              <a:rPr sz="850" b="1">
+                <a:solidFill>
+                  <a:srgbClr val="141C26"/>
+                </a:solidFill>
+                <a:latin typeface="Calibri"/>
+              </a:rPr>
+              <a:t>8  Confidence vs IoU</a:t>
+            </a:r>
+          </a:p>
+        </p:txBody>
+      </p:sp>
+      <p:sp>
+        <p:nvSpPr>
+          <p:cNvPr id="48" name="TextBox 47"/>
           <p:cNvSpPr txBox="1"/>
           <p:nvPr/>
         </p:nvSpPr>
         <p:spPr>
           <a:xfrm>
-            <a:off x="502920" y="4983480"/>
-            <a:ext cx="5394960" cy="914400"/>
+            <a:off x="5760720" y="4315968"/>
+            <a:ext cx="5925312" cy="146304"/>
           </a:xfrm>
           <a:prstGeom prst="rect">
             <a:avLst/>
@@ -7427,31 +7402,75 @@
           <a:p>
             <a:pPr algn="l">
               <a:lnSpc>
-                <a:spcPct val="118000"/>
-              </a:lnSpc>
-            </a:pPr>
-            <a:r>
-              <a:rPr sz="1000" b="0">
+                <a:spcPct val="100000"/>
+              </a:lnSpc>
+            </a:pPr>
+            <a:r>
+              <a:rPr sz="800" b="0">
                 <a:solidFill>
                   <a:srgbClr val="5B6775"/>
                 </a:solidFill>
-                <a:latin typeface="Calibri"/>
-              </a:rPr>
-              <a:t>The subscription is BEST_EFFORT, KEEP_LAST, depth 1. While inference runs, arriving frames overwrite a single slot, so the detector always works on the newest image instead of falling behind a queue. The frames it discards are frames it could not have processed anyway.</a:t>
-            </a:r>
-          </a:p>
-        </p:txBody>
-      </p:sp>
-      <p:sp>
-        <p:nvSpPr>
-          <p:cNvPr id="48" name="TextBox 47"/>
+                <a:latin typeface="Consolas"/>
+              </a:rPr>
+              <a:t>conf 0.40 explicit  vs  IoU 0.70 (NMS default) -- different filters</a:t>
+            </a:r>
+          </a:p>
+        </p:txBody>
+      </p:sp>
+      <p:sp>
+        <p:nvSpPr>
+          <p:cNvPr id="49" name="Rectangle 48"/>
+          <p:cNvSpPr/>
+          <p:nvPr/>
+        </p:nvSpPr>
+        <p:spPr>
+          <a:xfrm>
+            <a:off x="5760720" y="4466844"/>
+            <a:ext cx="5925312" cy="7315"/>
+          </a:xfrm>
+          <a:prstGeom prst="rect">
+            <a:avLst/>
+          </a:prstGeom>
+          <a:solidFill>
+            <a:srgbClr val="D3DAE3"/>
+          </a:solidFill>
+          <a:ln>
+            <a:noFill/>
+          </a:ln>
+          <a:effectLst/>
+        </p:spPr>
+        <p:style>
+          <a:lnRef idx="1">
+            <a:schemeClr val="accent1"/>
+          </a:lnRef>
+          <a:fillRef idx="3">
+            <a:schemeClr val="accent1"/>
+          </a:fillRef>
+          <a:effectRef idx="2">
+            <a:schemeClr val="accent1"/>
+          </a:effectRef>
+          <a:fontRef idx="minor">
+            <a:schemeClr val="lt1"/>
+          </a:fontRef>
+        </p:style>
+        <p:txBody>
+          <a:bodyPr rtlCol="0" anchor="ctr"/>
+          <a:lstStyle/>
+          <a:p>
+            <a:pPr algn="ctr"/>
+          </a:p>
+        </p:txBody>
+      </p:sp>
+      <p:sp>
+        <p:nvSpPr>
+          <p:cNvPr id="50" name="TextBox 49"/>
           <p:cNvSpPr txBox="1"/>
           <p:nvPr/>
         </p:nvSpPr>
         <p:spPr>
           <a:xfrm>
-            <a:off x="502920" y="5897880"/>
-            <a:ext cx="5394960" cy="201168"/>
+            <a:off x="502920" y="4626864"/>
+            <a:ext cx="5394960" cy="182880"/>
           </a:xfrm>
           <a:prstGeom prst="rect">
             <a:avLst/>
@@ -7476,21 +7495,21 @@
                 </a:solidFill>
                 <a:latin typeface="Consolas"/>
               </a:rPr>
-              <a:t>GEOMETRY IS THE LIMIT, NOT THE MODEL</a:t>
-            </a:r>
-          </a:p>
-        </p:txBody>
-      </p:sp>
-      <p:sp>
-        <p:nvSpPr>
-          <p:cNvPr id="49" name="TextBox 48"/>
+              <a:t>WHAT THIS MEANS FOR THIS DEPLOYMENT</a:t>
+            </a:r>
+          </a:p>
+        </p:txBody>
+      </p:sp>
+      <p:sp>
+        <p:nvSpPr>
+          <p:cNvPr id="51" name="TextBox 50"/>
           <p:cNvSpPr txBox="1"/>
           <p:nvPr/>
         </p:nvSpPr>
         <p:spPr>
           <a:xfrm>
-            <a:off x="502920" y="6126480"/>
-            <a:ext cx="5394960" cy="914400"/>
+            <a:off x="502920" y="4846320"/>
+            <a:ext cx="5394960" cy="1417320"/>
           </a:xfrm>
           <a:prstGeom prst="rect">
             <a:avLst/>
@@ -7505,31 +7524,31 @@
           <a:p>
             <a:pPr algn="l">
               <a:lnSpc>
-                <a:spcPct val="118000"/>
-              </a:lnSpc>
-            </a:pPr>
-            <a:r>
-              <a:rPr sz="1000" b="0">
+                <a:spcPct val="116000"/>
+              </a:lnSpc>
+            </a:pPr>
+            <a:r>
+              <a:rPr sz="950" b="0">
                 <a:solidFill>
                   <a:srgbClr val="5B6775"/>
                 </a:solidFill>
                 <a:latin typeface="Calibri"/>
               </a:rPr>
-              <a:t>At 30 m a standing person subtends about 30 px — the floor of what YOLO resolves reliably. At 20 m it is ~45 px. Camera resolution cannot help: the exported model input is frozen at 384×640, so a larger sensor image is simply scaled back down.</a:t>
-            </a:r>
-          </a:p>
-        </p:txBody>
-      </p:sp>
-      <p:sp>
-        <p:nvSpPr>
-          <p:cNvPr id="50" name="TextBox 49"/>
+              <a:t>Frames are dropped by design: BEST_EFFORT, KEEP_LAST, depth 1 means the detector always works the newest frame instead of a queue, so discarded frames were never processable anyway. Geometry, not the model, sets the ceiling — camera resolution is frozen at the export shape, so a person's pixel height is fixed by altitude and pitch alone once conf and IoU are set.</a:t>
+            </a:r>
+          </a:p>
+        </p:txBody>
+      </p:sp>
+      <p:sp>
+        <p:nvSpPr>
+          <p:cNvPr id="52" name="TextBox 51"/>
           <p:cNvSpPr txBox="1"/>
           <p:nvPr/>
         </p:nvSpPr>
         <p:spPr>
           <a:xfrm>
-            <a:off x="6263640" y="4754880"/>
-            <a:ext cx="5394960" cy="201168"/>
+            <a:off x="6263640" y="4626864"/>
+            <a:ext cx="5394960" cy="182880"/>
           </a:xfrm>
           <a:prstGeom prst="rect">
             <a:avLst/>
@@ -7561,14 +7580,14 @@
       </p:sp>
       <p:sp>
         <p:nvSpPr>
-          <p:cNvPr id="51" name="TextBox 50"/>
+          <p:cNvPr id="53" name="TextBox 52"/>
           <p:cNvSpPr txBox="1"/>
           <p:nvPr/>
         </p:nvSpPr>
         <p:spPr>
           <a:xfrm>
-            <a:off x="6263640" y="4983480"/>
-            <a:ext cx="5394960" cy="1737360"/>
+            <a:off x="6263640" y="4846320"/>
+            <a:ext cx="5394960" cy="1417320"/>
           </a:xfrm>
           <a:prstGeom prst="rect">
             <a:avLst/>
@@ -7583,27 +7602,27 @@
           <a:p>
             <a:pPr algn="l">
               <a:lnSpc>
-                <a:spcPct val="118000"/>
-              </a:lnSpc>
-            </a:pPr>
-            <a:r>
-              <a:rPr sz="1000" b="0">
+                <a:spcPct val="116000"/>
+              </a:lnSpc>
+            </a:pPr>
+            <a:r>
+              <a:rPr sz="950" b="0">
                 <a:solidFill>
                   <a:srgbClr val="5B6775"/>
                 </a:solidFill>
                 <a:latin typeface="Calibri"/>
               </a:rPr>
-              <a:t>UAV1 flew a hold 41 m from a static group and detected a person in 50 of 357 frames (14.0 %).</a:t>
-            </a:r>
-          </a:p>
-          <a:p>
-            <a:pPr algn="l">
-              <a:lnSpc>
-                <a:spcPct val="118000"/>
-              </a:lnSpc>
-            </a:pPr>
-            <a:r>
-              <a:rPr sz="500" b="0">
+              <a:t>UAV1 held station near a static group: 50 of 357 frames detected a person (14.0 %).</a:t>
+            </a:r>
+          </a:p>
+          <a:p>
+            <a:pPr algn="l">
+              <a:lnSpc>
+                <a:spcPct val="116000"/>
+              </a:lnSpc>
+            </a:pPr>
+            <a:r>
+              <a:rPr sz="400" b="0">
                 <a:solidFill>
                   <a:srgbClr val="5B6775"/>
                 </a:solidFill>
@@ -7615,27 +7634,27 @@
           <a:p>
             <a:pPr algn="l">
               <a:lnSpc>
-                <a:spcPct val="118000"/>
-              </a:lnSpc>
-            </a:pPr>
-            <a:r>
-              <a:rPr sz="1000" b="0">
+                <a:spcPct val="116000"/>
+              </a:lnSpc>
+            </a:pPr>
+            <a:r>
+              <a:rPr sz="950" b="0">
                 <a:solidFill>
                   <a:srgbClr val="5B6775"/>
                 </a:solidFill>
                 <a:latin typeface="Calibri"/>
               </a:rPr>
-              <a:t>UAV2 flew along the walking subject's own path and detected one in 8 of 523 frames (1.5 %).</a:t>
-            </a:r>
-          </a:p>
-          <a:p>
-            <a:pPr algn="l">
-              <a:lnSpc>
-                <a:spcPct val="118000"/>
-              </a:lnSpc>
-            </a:pPr>
-            <a:r>
-              <a:rPr sz="500" b="0">
+              <a:t>UAV2 overflew the walking subject at the same altitude and settings: 8 of 523 (1.5 %).</a:t>
+            </a:r>
+          </a:p>
+          <a:p>
+            <a:pPr algn="l">
+              <a:lnSpc>
+                <a:spcPct val="116000"/>
+              </a:lnSpc>
+            </a:pPr>
+            <a:r>
+              <a:rPr sz="400" b="0">
                 <a:solidFill>
                   <a:srgbClr val="5B6775"/>
                 </a:solidFill>
@@ -7647,17 +7666,17 @@
           <a:p>
             <a:pPr algn="l">
               <a:lnSpc>
-                <a:spcPct val="118000"/>
-              </a:lnSpc>
-            </a:pPr>
-            <a:r>
-              <a:rPr sz="1000" b="0">
+                <a:spcPct val="116000"/>
+              </a:lnSpc>
+            </a:pPr>
+            <a:r>
+              <a:rPr sz="950" b="0">
                 <a:solidFill>
                   <a:srgbClr val="141C26"/>
                 </a:solidFill>
                 <a:latin typeface="Calibri"/>
               </a:rPr>
-              <a:t>Same model, same settings, same boards. The difference is where the camera was pointed and for how long — a stationary hold sees the target for a hundred frames; a fly-past sees it for a handful.</a:t>
+              <a:t>Same model, same conf/IoU, same boards. The gap is dwell time on target — exactly what parameters 3-6 above predict.</a:t>
             </a:r>
           </a:p>
         </p:txBody>
